--- a/labs/150-ssh-keys-x11-forwarding/assets/SSH Keys and X11 Forwarding SUBMISSION TEMPLATE.pptx
+++ b/labs/150-ssh-keys-x11-forwarding/assets/SSH Keys and X11 Forwarding SUBMISSION TEMPLATE.pptx
@@ -6671,7 +6671,8 @@
           <a:lstStyle/>
           <a:p>
             <a:r>
-              <a:t>Screenshot 1</a:t>
+              <a:rPr sz="1800"/>
+              <a:t>Screenshot 1 Public key on the Debian shell matching the exact server key displayed by PuTTY.</a:t>
             </a:r>
           </a:p>
         </p:txBody>
@@ -6698,11 +6699,7 @@
             <a:normAutofit/>
           </a:bodyPr>
           <a:lstStyle/>
-          <a:p>
-            <a:r>
-              <a:t>Public key on the Debian shell matching the exact server key displayed by PuTTY.</a:t>
-            </a:r>
-          </a:p>
+          <a:p/>
         </p:txBody>
       </p:sp>
     </p:spTree>
@@ -6754,7 +6751,8 @@
           <a:lstStyle/>
           <a:p>
             <a:r>
-              <a:t>Screenshot 2</a:t>
+              <a:rPr sz="1800"/>
+              <a:t>Screenshot 2 Login that automatically uses the username and authenticates with the public key using your full-name comment.</a:t>
             </a:r>
           </a:p>
         </p:txBody>
@@ -6781,11 +6779,7 @@
             <a:normAutofit/>
           </a:bodyPr>
           <a:lstStyle/>
-          <a:p>
-            <a:r>
-              <a:t>Login that automatically uses the username and authenticates with the public key using your full-name comment.</a:t>
-            </a:r>
-          </a:p>
+          <a:p/>
         </p:txBody>
       </p:sp>
     </p:spTree>
@@ -6837,7 +6831,8 @@
           <a:lstStyle/>
           <a:p>
             <a:r>
-              <a:t>Screenshot 3</a:t>
+              <a:rPr sz="2000"/>
+              <a:t>Screenshot 3 Your superhero account authenticating through the agent.</a:t>
             </a:r>
           </a:p>
         </p:txBody>
@@ -6864,11 +6859,7 @@
             <a:normAutofit/>
           </a:bodyPr>
           <a:lstStyle/>
-          <a:p>
-            <a:r>
-              <a:t>Your superhero account authenticating through the agent.</a:t>
-            </a:r>
-          </a:p>
+          <a:p/>
         </p:txBody>
       </p:sp>
     </p:spTree>
@@ -6920,7 +6911,8 @@
           <a:lstStyle/>
           <a:p>
             <a:r>
-              <a:t>Screenshot 4</a:t>
+              <a:rPr sz="2000"/>
+              <a:t>Screenshot 4 An xterm window with a long listing of your home directory.</a:t>
             </a:r>
           </a:p>
         </p:txBody>
@@ -6947,11 +6939,7 @@
             <a:normAutofit/>
           </a:bodyPr>
           <a:lstStyle/>
-          <a:p>
-            <a:r>
-              <a:t>An xterm window with a long listing of your home directory.</a:t>
-            </a:r>
-          </a:p>
+          <a:p/>
         </p:txBody>
       </p:sp>
     </p:spTree>
